--- a/docs/submission/Qalqan_pitch-deck.pptx
+++ b/docs/submission/Qalqan_pitch-deck.pptx
@@ -208,16 +208,16 @@
                 <c:formatCode>General</c:formatCode>
                 <c:ptCount val="4"/>
                 <c:pt idx="0">
-                  <c:v>0.751</c:v>
+                  <c:v>0.799</c:v>
                 </c:pt>
                 <c:pt idx="1">
-                  <c:v>0.733</c:v>
+                  <c:v>0.91</c:v>
                 </c:pt>
                 <c:pt idx="2">
-                  <c:v>0.598</c:v>
+                  <c:v>0.67</c:v>
                 </c:pt>
                 <c:pt idx="3">
-                  <c:v>0.709</c:v>
+                  <c:v>0.789</c:v>
                 </c:pt>
               </c:numCache>
             </c:numRef>
@@ -573,10 +573,10 @@
                 <c:formatCode>General</c:formatCode>
                 <c:ptCount val="5"/>
                 <c:pt idx="0">
-                  <c:v>0.858</c:v>
+                  <c:v>0.824</c:v>
                 </c:pt>
                 <c:pt idx="1">
-                  <c:v>0.839</c:v>
+                  <c:v>0.756</c:v>
                 </c:pt>
                 <c:pt idx="2">
                   <c:v>0</c:v>
@@ -680,13 +680,13 @@
                   <c:v>0</c:v>
                 </c:pt>
                 <c:pt idx="2">
-                  <c:v>0.786</c:v>
+                  <c:v>0.592</c:v>
                 </c:pt>
                 <c:pt idx="3">
-                  <c:v>0.556</c:v>
+                  <c:v>0.647</c:v>
                 </c:pt>
                 <c:pt idx="4">
-                  <c:v>0.746</c:v>
+                  <c:v>0.706</c:v>
                 </c:pt>
               </c:numCache>
             </c:numRef>
@@ -966,16 +966,16 @@
                 <c:formatCode>General</c:formatCode>
                 <c:ptCount val="11"/>
                 <c:pt idx="0">
-                  <c:v>0.45</c:v>
+                  <c:v>0.48</c:v>
                 </c:pt>
                 <c:pt idx="1">
-                  <c:v>0.453</c:v>
+                  <c:v>0.472</c:v>
                 </c:pt>
                 <c:pt idx="2">
-                  <c:v>0.446</c:v>
+                  <c:v>1</c:v>
                 </c:pt>
                 <c:pt idx="3">
-                  <c:v>0.994</c:v>
+                  <c:v>1</c:v>
                 </c:pt>
                 <c:pt idx="4">
                   <c:v>1</c:v>
@@ -996,7 +996,7 @@
                   <c:v>1</c:v>
                 </c:pt>
                 <c:pt idx="10">
-                  <c:v>1</c:v>
+                  <c:v>0.999</c:v>
                 </c:pt>
               </c:numCache>
             </c:numRef>
@@ -1131,28 +1131,28 @@
                   <c:v>0</c:v>
                 </c:pt>
                 <c:pt idx="3">
-                  <c:v>0</c:v>
+                  <c:v>0.55</c:v>
                 </c:pt>
                 <c:pt idx="4">
-                  <c:v>0</c:v>
+                  <c:v>0.495</c:v>
                 </c:pt>
                 <c:pt idx="5">
-                  <c:v>0</c:v>
+                  <c:v>0.446</c:v>
                 </c:pt>
                 <c:pt idx="6">
-                  <c:v>0.93</c:v>
+                  <c:v>0.401</c:v>
                 </c:pt>
                 <c:pt idx="7">
-                  <c:v>0.837</c:v>
+                  <c:v>0.85</c:v>
                 </c:pt>
                 <c:pt idx="8">
-                  <c:v>0.9</c:v>
+                  <c:v>0.765</c:v>
                 </c:pt>
                 <c:pt idx="9">
-                  <c:v>0.9</c:v>
+                  <c:v>0.689</c:v>
                 </c:pt>
                 <c:pt idx="10">
-                  <c:v>0.81</c:v>
+                  <c:v>0.62</c:v>
                 </c:pt>
               </c:numCache>
             </c:numRef>
@@ -2184,7 +2184,7 @@
           <a:p>
             <a:r>
               <a:rPr lang="en-US" dirty="0"/>
-              <a:t>Любой мошеннический звонок — это сценарий: контакт, доверие, угроза, изоляция и давление, и только потом просьба назвать код. Правила на ключевых словах срабатывают на самой просьбе — это уже поздно. Мы поднимаем тревогу на стадии давления — в 91–94% случаев раньше, чем прозвучит просьба кода.</a:t>
+              <a:t>Любой мошеннический звонок — это сценарий: контакт, доверие, угроза, изоляция и давление, и только потом просьба назвать код. Правила на ключевых словах срабатывают на самой просьбе — это уже поздно. Мы поднимаем тревогу на стадии давления — в 85% случаев раньше, чем прозвучит просьба кода.</a:t>
             </a:r>
             <a:endParaRPr lang="en-US" dirty="0"/>
           </a:p>
@@ -2448,7 +2448,7 @@
           <a:p>
             <a:r>
               <a:rPr lang="en-US" dirty="0"/>
-              <a:t>Важный момент честности. Первая модель показала на синтетике почти 0.98 — и провалилась на реальных звонках в банк: она выучила, что звонок про банк — это мошенничество. Мы нашли причину — тема и стиль приветствия выдавали класс — перестроили корпус и добавили автоматическую проверку. Теперь по приветствию класс не угадать, а на реальных звонках в банк качество выросло с 0.41 до 0.73.</a:t>
+              <a:t>Это про честность метода. Первая модель показала на синтетике почти 0.98 — и провалилась на реальных звонках в банк: она выучила, что звонок про банк — это мошенничество. Дальше нашлись ещё две лазейки: тест собирался из тех же формулировок, что обучение, и вежливость — слова «официальный» и «спасибо» звучали только у настоящих сотрудников. Каждый раз мы перестраивали корпус и добавляли автоматическую проверку. После последней починки метрика на нашем корпусе даже упала — 0.85 против 0.81, — а на реальных звонках выросла. Это и есть проверка на честность: метрика на своих же данных плохой судья.</a:t>
             </a:r>
             <a:endParaRPr lang="en-US" dirty="0"/>
           </a:p>
@@ -2536,7 +2536,7 @@
           <a:p>
             <a:r>
               <a:rPr lang="en-US" dirty="0"/>
-              <a:t>На реальных звонках модель, обученная только на синтетике, даёт AUC 0.71–0.75; правила — 0.5, то есть угадывание: живая речь не совпадает с их ключевыми словами. При одинаковой доле ложных тревог модель предупреждает до запроса кода в 91–94% случаев, правила — в 37–58%. Честно о слабом месте: легитимный звонок на ту же тему различается хуже — 0.60, и порог для реальных звонков нужно калибровать на данных банка.</a:t>
+              <a:t>На реальных звонках модель, обученная только на синтетике, даёт AUC от 0.67 до 0.91; правила — 0.5, то есть угадывание: живая речь не совпадает с их ключевыми словами. На отложенном тесте модель предупреждает до запроса кода в 85% случаев против 36% у правил, причём ложных тревог у неё вчетверо меньше. Если выставить модели тот же recall, что у правил, она ошибается на легитимных звонках в сотни раз реже: 0.1% против 43%. Честно о слабом месте: легитимный звонок на ту же тему различается хуже — 0.67, и порог для реальных звонков нужно калибровать на данных банка.</a:t>
             </a:r>
             <a:endParaRPr lang="en-US" dirty="0"/>
           </a:p>
@@ -2624,7 +2624,7 @@
           <a:p>
             <a:r>
               <a:rPr lang="en-US" dirty="0"/>
-              <a:t>Банки не могут обмениваться записями разговоров. Мы смоделировали три банка, каждый из которых видел только часть схем. В одиночку банк плохо ловит схемы, которых у него не было — до 0.56. Федеративное усреднение весов LoRA даёт 0.84 — почти как если бы все данные были в одном месте, — а передаётся всего 6 мегабайт весов за раунд.</a:t>
+              <a:t>Банки не могут обмениваться записями разговоров. Мы смоделировали три банка, каждый из которых видел только часть схем. В одиночку банк плохо ловит схемы, которых у него не было — 0.59 при 0.82 у общей модели. Федеративное усреднение весов LoRA даёт 0.76 — две трети разрыва закрыты, — а передаётся всего 6 мегабайт весов за раунд. Если же банки видели одни и те же схемы, выигрыш почти исчезает: польза именно в разном опыте.</a:t>
             </a:r>
             <a:endParaRPr lang="en-US" dirty="0"/>
           </a:p>
@@ -2712,7 +2712,7 @@
           <a:p>
             <a:r>
               <a:rPr lang="en-US" dirty="0"/>
-              <a:t>Вот как это выглядит. Мошенник представляется техподдержкой. На четвёртой реплике — «вижу ваш договор, в приложении сбой» — модель уже поднимает тревогу. Правила молчат до седьмой реплики, когда человек уже ставит программу удалённого доступа. А на настоящей техподдержке на казахском правила дают ложную тревогу на фразе «не кладите трубку», а модель понимает контекст и остаётся на нуле.</a:t>
+              <a:t>Вот как это выглядит. Мошенник представляется техподдержкой и предлагает вернуть деньги за двойное списание. На третьей реплике модель уже поднимает тревогу — за три реплики до того, как человека заводят в мобильный банк. Правила молчат до восьмой. А на настоящей техподдержке на казахском правила дают ложную тревогу на фразе «не кладите трубку», а модель понимает контекст и остаётся спокойной. В демо есть и живой режим: телефон на громкой связи, ноутбук слушает, распознаёт речь и пересчитывает риск — от конца фразы до тревоги около трёх секунд.</a:t>
             </a:r>
             <a:endParaRPr lang="en-US" dirty="0"/>
           </a:p>
@@ -7968,7 +7968,7 @@
                 <a:ea typeface="Calibri" pitchFamily="34" charset="-122"/>
                 <a:cs typeface="Calibri" pitchFamily="34" charset="-120"/>
               </a:rPr>
-              <a:t>Қалқан: тревога здесь — в 91–94% случаев до кода</a:t>
+              <a:t>Қалқан: тревога здесь — в 85% случаев до кода</a:t>
             </a:r>
             <a:endParaRPr lang="en-US" sz="1400" dirty="0"/>
           </a:p>
@@ -9702,7 +9702,7 @@
                 <a:ea typeface="Calibri" pitchFamily="34" charset="-122"/>
                 <a:cs typeface="Calibri" pitchFamily="34" charset="-120"/>
               </a:rPr>
-              <a:t>~32 600</a:t>
+              <a:t>44 580</a:t>
             </a:r>
             <a:endParaRPr lang="en-US" sz="4000" dirty="0"/>
           </a:p>
@@ -10040,7 +10040,7 @@
                 <a:ea typeface="Calibri" pitchFamily="34" charset="-122"/>
                 <a:cs typeface="Calibri" pitchFamily="34" charset="-120"/>
               </a:rPr>
-              <a:t>Отложенный тест — на формулировках, которых модель не видела</a:t>
+              <a:t>2 501 формулировка; отложенный тест — 0% реплик звонящего из обучающих шаблонов</a:t>
             </a:r>
             <a:endParaRPr lang="en-US" sz="1400" dirty="0"/>
           </a:p>
@@ -10364,7 +10364,7 @@
                 <a:ea typeface="Calibri" pitchFamily="34" charset="-122"/>
                 <a:cs typeface="Calibri" pitchFamily="34" charset="-120"/>
               </a:rPr>
-              <a:t>Нашли и устранили ловушку синтетических данных</a:t>
+              <a:t>Нашли и устранили три ловушки синтетических данных</a:t>
             </a:r>
             <a:endParaRPr lang="en-US" sz="3200" dirty="0"/>
           </a:p>
@@ -10403,7 +10403,7 @@
                 <a:ea typeface="Calibri" pitchFamily="34" charset="-122"/>
                 <a:cs typeface="Calibri" pitchFamily="34" charset="-120"/>
               </a:rPr>
-              <a:t>Первая версия корпуса: тема звонка выдавала ответ, и модель выучила «звонок про банк = мошенничество»</a:t>
+              <a:t>Корпус переделан трижды: тема выдавала класс, формулировки теста повторяли обучение, вежливость выдавала настоящего сотрудника</a:t>
             </a:r>
             <a:endParaRPr lang="en-US" sz="1600" dirty="0"/>
           </a:p>
@@ -10496,7 +10496,7 @@
                 <a:ea typeface="Calibri" pitchFamily="34" charset="-122"/>
                 <a:cs typeface="Calibri" pitchFamily="34" charset="-120"/>
               </a:rPr>
-              <a:t>Корпус v1</a:t>
+              <a:t>Было</a:t>
             </a:r>
             <a:endParaRPr lang="en-US" sz="2000" dirty="0"/>
           </a:p>
@@ -10535,7 +10535,7 @@
                 <a:ea typeface="Calibri" pitchFamily="34" charset="-122"/>
                 <a:cs typeface="Calibri" pitchFamily="34" charset="-120"/>
               </a:rPr>
-              <a:t>Корпус v2</a:t>
+              <a:t>Стало — корпус v3.1</a:t>
             </a:r>
             <a:endParaRPr lang="en-US" sz="2000" dirty="0"/>
           </a:p>
@@ -10652,7 +10652,7 @@
                 <a:ea typeface="Calibri" pitchFamily="34" charset="-122"/>
                 <a:cs typeface="Calibri" pitchFamily="34" charset="-120"/>
               </a:rPr>
-              <a:t>0.501</a:t>
+              <a:t>0.517</a:t>
             </a:r>
             <a:endParaRPr lang="en-US" sz="3000" dirty="0"/>
           </a:p>
@@ -10730,7 +10730,7 @@
                 <a:ea typeface="Calibri" pitchFamily="34" charset="-122"/>
                 <a:cs typeface="Calibri" pitchFamily="34" charset="-120"/>
               </a:rPr>
-              <a:t>≈ 100%</a:t>
+              <a:t>до 88%</a:t>
             </a:r>
             <a:endParaRPr lang="en-US" sz="3000" dirty="0"/>
           </a:p>
@@ -10769,7 +10769,7 @@
                 <a:ea typeface="Calibri" pitchFamily="34" charset="-122"/>
                 <a:cs typeface="Calibri" pitchFamily="34" charset="-120"/>
               </a:rPr>
-              <a:t>Риск по приветствию настоящего банка</a:t>
+              <a:t>Реплики теста, собранные из обучающих формулировок</a:t>
             </a:r>
             <a:endParaRPr lang="en-US" sz="1300" dirty="0"/>
           </a:p>
@@ -10808,7 +10808,7 @@
                 <a:ea typeface="Calibri" pitchFamily="34" charset="-122"/>
                 <a:cs typeface="Calibri" pitchFamily="34" charset="-120"/>
               </a:rPr>
-              <a:t>≈ 45% — «пока неясно»</a:t>
+              <a:t>0%</a:t>
             </a:r>
             <a:endParaRPr lang="en-US" sz="3000" dirty="0"/>
           </a:p>
@@ -10847,7 +10847,7 @@
                 <a:ea typeface="Calibri" pitchFamily="34" charset="-122"/>
                 <a:cs typeface="Calibri" pitchFamily="34" charset="-120"/>
               </a:rPr>
-              <a:t>Риск по приветствию настоящего банка</a:t>
+              <a:t>Реплики теста, собранные из обучающих формулировок</a:t>
             </a:r>
             <a:endParaRPr lang="en-US" sz="1300" dirty="0"/>
           </a:p>
@@ -10964,7 +10964,7 @@
                 <a:ea typeface="Calibri" pitchFamily="34" charset="-122"/>
                 <a:cs typeface="Calibri" pitchFamily="34" charset="-120"/>
               </a:rPr>
-              <a:t>0.73</a:t>
+              <a:t>0.91</a:t>
             </a:r>
             <a:endParaRPr lang="en-US" sz="3000" dirty="0"/>
           </a:p>
@@ -11067,7 +11067,7 @@
                 <a:ea typeface="Calibri" pitchFamily="34" charset="-122"/>
                 <a:cs typeface="Calibri" pitchFamily="34" charset="-120"/>
               </a:rPr>
-              <a:t>11 пар «мошенничество — легитимный звонок на ту же тему», общие приветствия, автопроверка в CI-скрипте</a:t>
+              <a:t>Каждая ловушка теперь проверяется автоматически: темы, начало разговора, форма реплик, слова доверия (check_separability.py)</a:t>
             </a:r>
             <a:endParaRPr lang="en-US" sz="1400" dirty="0"/>
           </a:p>
@@ -11252,7 +11252,7 @@
                 <a:ea typeface="Calibri" pitchFamily="34" charset="-122"/>
                 <a:cs typeface="Calibri" pitchFamily="34" charset="-120"/>
               </a:rPr>
-              <a:t>91–94%</a:t>
+              <a:t>85%</a:t>
             </a:r>
             <a:endParaRPr lang="en-US" sz="4400" dirty="0"/>
           </a:p>
@@ -11291,24 +11291,7 @@
                 <a:ea typeface="Calibri" pitchFamily="34" charset="-122"/>
                 <a:cs typeface="Calibri" pitchFamily="34" charset="-120"/>
               </a:rPr>
-              <a:t>тревог — ДО запроса кода или перевода</a:t>
-            </a:r>
-            <a:endParaRPr lang="en-US" sz="1300" dirty="0"/>
-          </a:p>
-          <a:p>
-            <a:pPr indent="0" marL="0">
-              <a:buNone/>
-            </a:pPr>
-            <a:r>
-              <a:rPr lang="en-US" sz="1300" dirty="0">
-                <a:solidFill>
-                  <a:srgbClr val="1F2937"/>
-                </a:solidFill>
-                <a:latin typeface="Calibri" pitchFamily="34" charset="0"/>
-                <a:ea typeface="Calibri" pitchFamily="34" charset="-122"/>
-                <a:cs typeface="Calibri" pitchFamily="34" charset="-120"/>
-              </a:rPr>
-              <a:t>(правила: 37–58%) при одинаковой доле ложных тревог</a:t>
+              <a:t>тревог — ДО запроса кода или перевода (правила: 36%), и ложных тревог вчетверо меньше: 9% против 43%</a:t>
             </a:r>
             <a:endParaRPr lang="en-US" sz="1300" dirty="0"/>
           </a:p>
@@ -11452,7 +11435,7 @@
                 <a:ea typeface="Calibri" pitchFamily="34" charset="-122"/>
                 <a:cs typeface="Calibri" pitchFamily="34" charset="-120"/>
               </a:rPr>
-              <a:t>Самый трудный набор — легитимный звонок на ту же тему (0.60): главное направление доработки. Порог нужно калибровать на данных банка.</a:t>
+              <a:t>Самый трудный набор — легитимный звонок на ту же тему (0.67): главное направление доработки. Порог нужно калибровать на данных банка.</a:t>
             </a:r>
             <a:endParaRPr lang="en-US" sz="1000" dirty="0"/>
           </a:p>
@@ -11555,7 +11538,7 @@
                 <a:ea typeface="Calibri" pitchFamily="34" charset="-122"/>
                 <a:cs typeface="Calibri" pitchFamily="34" charset="-120"/>
               </a:rPr>
-              <a:t>Эксперимент: 3 банка, каждый видел только часть мошеннических схем. Метрика — ROC AUC на валидации</a:t>
+              <a:t>Эксперимент: 3 банка, каждый видел только часть мошеннических схем. Метрика — ROC AUC на отложенном тесте</a:t>
             </a:r>
             <a:endParaRPr lang="en-US" sz="1600" dirty="0"/>
           </a:p>
@@ -12318,7 +12301,7 @@
                 <a:ea typeface="Calibri" pitchFamily="34" charset="-122"/>
                 <a:cs typeface="Calibri" pitchFamily="34" charset="-120"/>
               </a:rPr>
-              <a:t>Банк, который не встречал схему, её не ловит (до 0.56). Обмен весами почти догоняет общий датасет — без передачи записей.</a:t>
+              <a:t>Банк, который не встречал схему, ловит её плохо (0.59). Обмен весами закрывает две трети разрыва — без передачи записей.</a:t>
             </a:r>
             <a:endParaRPr lang="en-US" sz="1500" dirty="0"/>
           </a:p>
@@ -12421,7 +12404,7 @@
                 <a:ea typeface="Calibri" pitchFamily="34" charset="-122"/>
                 <a:cs typeface="Calibri" pitchFamily="34" charset="-120"/>
               </a:rPr>
-              <a:t>Реплики из отложенного набора — модель их не видела. Streamlit-прототип, видео до 5 минут</a:t>
+              <a:t>Реплики из отложенного набора — модель их не видела. Streamlit-прототип: разговор по репликам и живой звонок</a:t>
             </a:r>
             <a:endParaRPr lang="en-US" sz="1600" dirty="0"/>
           </a:p>
@@ -12567,7 +12550,7 @@
                 <a:ea typeface="Calibri" pitchFamily="34" charset="-122"/>
                 <a:cs typeface="Calibri" pitchFamily="34" charset="-120"/>
               </a:rPr>
-              <a:t>Реплика 4 — тревога модели</a:t>
+              <a:t>Реплика 3 — тревога модели</a:t>
             </a:r>
             <a:endParaRPr lang="en-US" sz="1500" dirty="0"/>
           </a:p>
@@ -12606,7 +12589,7 @@
                 <a:ea typeface="Calibri" pitchFamily="34" charset="-122"/>
                 <a:cs typeface="Calibri" pitchFamily="34" charset="-120"/>
               </a:rPr>
-              <a:t>«Вижу ваш договор… В приложении банка обнаружен сбой» — за 3 реплики до просьбы</a:t>
+              <a:t>«Чтобы вернуть деньги за двойное списание, нужно подключиться к приложению» — за 3 реплики до захвата</a:t>
             </a:r>
             <a:endParaRPr lang="en-US" sz="1200" dirty="0"/>
           </a:p>
@@ -12697,7 +12680,7 @@
                 <a:ea typeface="Calibri" pitchFamily="34" charset="-122"/>
                 <a:cs typeface="Calibri" pitchFamily="34" charset="-120"/>
               </a:rPr>
-              <a:t>Реплика 7 — правила</a:t>
+              <a:t>Реплика 8 — правила</a:t>
             </a:r>
             <a:endParaRPr lang="en-US" sz="1500" dirty="0"/>
           </a:p>
@@ -12736,7 +12719,7 @@
                 <a:ea typeface="Calibri" pitchFamily="34" charset="-122"/>
                 <a:cs typeface="Calibri" pitchFamily="34" charset="-120"/>
               </a:rPr>
-              <a:t>«Установите QuickSupport» — программа уже устанавливается</a:t>
+              <a:t>Ключевые слова срабатывают, когда человек уже в мобильном банке под диктовку</a:t>
             </a:r>
             <a:endParaRPr lang="en-US" sz="1200" dirty="0"/>
           </a:p>
@@ -12866,7 +12849,7 @@
                 <a:ea typeface="Calibri" pitchFamily="34" charset="-122"/>
                 <a:cs typeface="Calibri" pitchFamily="34" charset="-120"/>
               </a:rPr>
-              <a:t>«Телефонды қоймаңыз, желіні тексеремін» — правила: ложная тревога; модель: 0%</a:t>
+              <a:t>«Телефонды қоймаңыз, желіні тексеремін» — правила: ложная тревога; у модели тревоги нет</a:t>
             </a:r>
             <a:endParaRPr lang="en-US" sz="1200" dirty="0"/>
           </a:p>
@@ -12897,7 +12880,7 @@
               <a:buNone/>
             </a:pPr>
             <a:r>
-              <a:rPr lang="en-US" sz="1400" b="1" dirty="0">
+              <a:rPr lang="en-US" sz="1300" b="1" dirty="0">
                 <a:solidFill>
                   <a:srgbClr val="14213D"/>
                 </a:solidFill>
@@ -12905,9 +12888,9 @@
                 <a:ea typeface="Calibri" pitchFamily="34" charset="-122"/>
                 <a:cs typeface="Calibri" pitchFamily="34" charset="-120"/>
               </a:rPr>
-              <a:t>Видео-демо: [ссылка]   ·   Код: github.com/daurenoralbek/qalqan</a:t>
-            </a:r>
-            <a:endParaRPr lang="en-US" sz="1400" dirty="0"/>
+              <a:t>Живой звонок: от конца фразы до тревоги 3,3 с на процессоре ноутбука   ·   Видео-демо: [ссылка]   ·   Код: github.com/daurenoralbek/qalqan</a:t>
+            </a:r>
+            <a:endParaRPr lang="en-US" sz="1300" dirty="0"/>
           </a:p>
         </p:txBody>
       </p:sp>

--- a/docs/submission/Qalqan_pitch-deck.pptx
+++ b/docs/submission/Qalqan_pitch-deck.pptx
@@ -2712,7 +2712,7 @@
           <a:p>
             <a:r>
               <a:rPr lang="en-US" dirty="0"/>
-              <a:t>Вот как это выглядит. Мошенник представляется техподдержкой и предлагает вернуть деньги за двойное списание. На третьей реплике модель уже поднимает тревогу — за три реплики до того, как человека заводят в мобильный банк. Правила молчат до восьмой. А на настоящей техподдержке на казахском правила дают ложную тревогу на фразе «не кладите трубку», а модель понимает контекст и остаётся спокойной. В демо есть и живой режим: телефон на громкой связи, ноутбук слушает, распознаёт речь и пересчитывает риск — от конца фразы до тревоги около трёх секунд.</a:t>
+              <a:t>Вот как это выглядит. Мошенник представляется техподдержкой и предлагает вернуть деньги за двойное списание. На третьей реплике модель уже поднимает тревогу — за три реплики до того, как человека заводят в мобильный банк. Правила молчат до восьмой. А на настоящей техподдержке на казахском правила дают ложную тревогу на фразе «не кладите трубку», а модель понимает контекст и остаётся спокойной. В демо есть и живой режим: телефон на громкой связи, ноутбук слушает, распознаёт речь и пересчитывает риск — от конца фразы до тревоги около полутора секунд. Распознавание — двуязычная модель NVIDIA, обученная сразу на казахском и русском.</a:t>
             </a:r>
             <a:endParaRPr lang="en-US" dirty="0"/>
           </a:p>
@@ -12888,7 +12888,7 @@
                 <a:ea typeface="Calibri" pitchFamily="34" charset="-122"/>
                 <a:cs typeface="Calibri" pitchFamily="34" charset="-120"/>
               </a:rPr>
-              <a:t>Живой звонок: от конца фразы до тревоги 3,3 с на процессоре ноутбука   ·   Видео-демо: [ссылка]   ·   Код: github.com/daurenoralbek/qalqan</a:t>
+              <a:t>Живой звонок: от конца фразы до тревоги 1,3 с на процессоре ноутбука   ·   Видео-демо: [ссылка]   ·   Код: github.com/daurenoralbek/qalqan</a:t>
             </a:r>
             <a:endParaRPr lang="en-US" sz="1300" dirty="0"/>
           </a:p>
